--- a/classes/parte-5-explotacion-de-sistemas-y-binarios/117-el-stack-los-registros-y-las-convenciones-de-llamada/clase-117-presentacion.pptx
+++ b/classes/parte-5-explotacion-de-sistemas-y-binarios/117-el-stack-los-registros-y-las-convenciones-de-llamada/clase-117-presentacion.pptx
@@ -17,6 +17,9 @@
     <p:sldId id="265" r:id="rId16"/>
     <p:sldId id="266" r:id="rId17"/>
     <p:sldId id="267" r:id="rId18"/>
+    <p:sldId id="268" r:id="rId19"/>
+    <p:sldId id="269" r:id="rId20"/>
+    <p:sldId id="270" r:id="rId21"/>
   </p:sldIdLst>
   <p:sldSz cx="9144000" cy="6858000" type="screen4x3"/>
   <p:notesSz cx="6858000" cy="9144000"/>
@@ -3198,7 +3201,7 @@
                   <a:srgbClr val="0B3D2E"/>
                 </a:solidFill>
               </a:rPr>
-              <a:t>⚠️ Errores comunes</a:t>
+              <a:t>✍️ Ejercicios</a:t>
             </a:r>
           </a:p>
         </p:txBody>
@@ -3236,67 +3239,82 @@
                   <a:srgbClr val="22282E"/>
                 </a:solidFill>
               </a:rPr>
-              <a:t>•  No encuentras saved RBP — Compilaste con optimización u -fomit-frame-pointer; usa -O0</a:t>
-            </a:r>
-          </a:p>
-          <a:p>
-            <a:pPr>
-              <a:spcAft>
-                <a:spcPts val="600"/>
-              </a:spcAft>
-            </a:pPr>
-            <a:r>
-              <a:rPr sz="1500">
-                <a:solidFill>
-                  <a:srgbClr val="22282E"/>
-                </a:solidFill>
-              </a:rPr>
-              <a:t>•  La dirección de retorno "no cuadra" — Confundes crecimiento del stack; recuerda que crece hacia abajo</a:t>
-            </a:r>
-          </a:p>
-          <a:p>
-            <a:pPr>
-              <a:spcAft>
-                <a:spcPts val="600"/>
-              </a:spcAft>
-            </a:pPr>
-            <a:r>
-              <a:rPr sz="1500">
-                <a:solidFill>
-                  <a:srgbClr val="22282E"/>
-                </a:solidFill>
-              </a:rPr>
-              <a:t>•  Segfault por desalineación en x64 — Falta alineación a 16 bytes en RSP antes de call</a:t>
-            </a:r>
-          </a:p>
-          <a:p>
-            <a:pPr>
-              <a:spcAft>
-                <a:spcPts val="600"/>
-              </a:spcAft>
-            </a:pPr>
-            <a:r>
-              <a:rPr sz="1500">
-                <a:solidFill>
-                  <a:srgbClr val="22282E"/>
-                </a:solidFill>
-              </a:rPr>
-              <a:t>•  Argumentos "vacíos" en registros — En x86 van por stack, no por registros</a:t>
-            </a:r>
-          </a:p>
-          <a:p>
-            <a:pPr>
-              <a:spcAft>
-                <a:spcPts val="600"/>
-              </a:spcAft>
-            </a:pPr>
-            <a:r>
-              <a:rPr sz="1500">
-                <a:solidFill>
-                  <a:srgbClr val="22282E"/>
-                </a:solidFill>
-              </a:rPr>
-              <a:t>•  info registers no muestra R8-R15 — Estás en un binario de 32 bits</a:t>
+              <a:t>•  Dibuja el stack frame de triple indicando offsets de r, saved RBP y ret address.</a:t>
+            </a:r>
+          </a:p>
+          <a:p>
+            <a:pPr>
+              <a:spcAft>
+                <a:spcPts val="600"/>
+              </a:spcAft>
+            </a:pPr>
+            <a:r>
+              <a:rPr sz="1500">
+                <a:solidFill>
+                  <a:srgbClr val="22282E"/>
+                </a:solidFill>
+              </a:rPr>
+              <a:t>•  Explica con tus palabras qué hacen exactamente call y ret sobre RSP y RIP.</a:t>
+            </a:r>
+          </a:p>
+          <a:p>
+            <a:pPr>
+              <a:spcAft>
+                <a:spcPts val="600"/>
+              </a:spcAft>
+            </a:pPr>
+            <a:r>
+              <a:rPr sz="1500">
+                <a:solidFill>
+                  <a:srgbClr val="22282E"/>
+                </a:solidFill>
+              </a:rPr>
+              <a:t>•  En x64, ¿en qué registros irían los argumentos de f(a,b,c,d)?</a:t>
+            </a:r>
+          </a:p>
+          <a:p>
+            <a:pPr>
+              <a:spcAft>
+                <a:spcPts val="600"/>
+              </a:spcAft>
+            </a:pPr>
+            <a:r>
+              <a:rPr sz="1500">
+                <a:solidFill>
+                  <a:srgbClr val="22282E"/>
+                </a:solidFill>
+              </a:rPr>
+              <a:t>•  Compila con -fomit-frame-pointer y describe cómo cambia el epílogo.</a:t>
+            </a:r>
+          </a:p>
+          <a:p>
+            <a:pPr>
+              <a:spcAft>
+                <a:spcPts val="600"/>
+              </a:spcAft>
+            </a:pPr>
+            <a:r>
+              <a:rPr sz="1500">
+                <a:solidFill>
+                  <a:srgbClr val="22282E"/>
+                </a:solidFill>
+              </a:rPr>
+              <a:t>•  Usa p $rsp y p $rbp en dos frames anidados y calcula el tamaño de cada frame.</a:t>
+            </a:r>
+          </a:p>
+          <a:p>
+            <a:pPr>
+              <a:spcAft>
+                <a:spcPts val="600"/>
+              </a:spcAft>
+            </a:pPr>
+            <a:r>
+              <a:rPr sz="1500">
+                <a:solidFill>
+                  <a:srgbClr val="22282E"/>
+                </a:solidFill>
+              </a:rPr>
+              <a:t>•  Investiga la convención Microsoft x64 y lista sus 4 registros de argumentos.</a:t>
             </a:r>
           </a:p>
         </p:txBody>
@@ -3347,7 +3365,7 @@
                   <a:srgbClr val="0B3D2E"/>
                 </a:solidFill>
               </a:rPr>
-              <a:t>❓ Preguntas frecuentes</a:t>
+              <a:t>📝 Reto verificable</a:t>
             </a:r>
           </a:p>
         </p:txBody>
@@ -3385,82 +3403,52 @@
                   <a:srgbClr val="22282E"/>
                 </a:solidFill>
               </a:rPr>
-              <a:t>•  ❓ ¿Por qué el stack crece hacia abajo? Es una convención histórica que permite que stack y heap</a:t>
-            </a:r>
-          </a:p>
-          <a:p>
-            <a:pPr>
-              <a:spcAft>
-                <a:spcPts val="600"/>
-              </a:spcAft>
-            </a:pPr>
-            <a:r>
-              <a:rPr sz="1500">
-                <a:solidFill>
-                  <a:srgbClr val="22282E"/>
-                </a:solidFill>
-              </a:rPr>
-              <a:t>•  crezcan uno hacia el otro maximizando el espacio disponible.</a:t>
-            </a:r>
-          </a:p>
-          <a:p>
-            <a:pPr>
-              <a:spcAft>
-                <a:spcPts val="600"/>
-              </a:spcAft>
-            </a:pPr>
-            <a:r>
-              <a:rPr sz="1500">
-                <a:solidFill>
-                  <a:srgbClr val="22282E"/>
-                </a:solidFill>
-              </a:rPr>
-              <a:t>•  ❓ ¿Qué diferencia hay entre cdecl y stdcall? Ambas pasan argumentos por stack en x86; en cdecl</a:t>
-            </a:r>
-          </a:p>
-          <a:p>
-            <a:pPr>
-              <a:spcAft>
-                <a:spcPts val="600"/>
-              </a:spcAft>
-            </a:pPr>
-            <a:r>
-              <a:rPr sz="1500">
-                <a:solidFill>
-                  <a:srgbClr val="22282E"/>
-                </a:solidFill>
-              </a:rPr>
-              <a:t>•  limpia el llamador, en stdcall limpia la función llamada.</a:t>
-            </a:r>
-          </a:p>
-          <a:p>
-            <a:pPr>
-              <a:spcAft>
-                <a:spcPts val="600"/>
-              </a:spcAft>
-            </a:pPr>
-            <a:r>
-              <a:rPr sz="1500">
-                <a:solidFill>
-                  <a:srgbClr val="22282E"/>
-                </a:solidFill>
-              </a:rPr>
-              <a:t>•  ❓ ¿La red zone puede romper mis exploits? Sí: si escribes bajo RSP asumiendo que está libre,</a:t>
-            </a:r>
-          </a:p>
-          <a:p>
-            <a:pPr>
-              <a:spcAft>
-                <a:spcPts val="600"/>
-              </a:spcAft>
-            </a:pPr>
-            <a:r>
-              <a:rPr sz="1500">
-                <a:solidFill>
-                  <a:srgbClr val="22282E"/>
-                </a:solidFill>
-              </a:rPr>
-              <a:t>•  puedes corromper datos que la función hoja usa.</a:t>
+              <a:t>•  Con GDB, encuentra e imprime la dirección de retorno de triple sin usar backtrace, solo con</a:t>
+            </a:r>
+          </a:p>
+          <a:p>
+            <a:pPr>
+              <a:spcAft>
+                <a:spcPts val="600"/>
+              </a:spcAft>
+            </a:pPr>
+            <a:r>
+              <a:rPr sz="1500">
+                <a:solidFill>
+                  <a:srgbClr val="22282E"/>
+                </a:solidFill>
+              </a:rPr>
+              <a:t>•  aritmética sobre $rbp.</a:t>
+            </a:r>
+          </a:p>
+          <a:p>
+            <a:pPr>
+              <a:spcAft>
+                <a:spcPts val="600"/>
+              </a:spcAft>
+            </a:pPr>
+            <a:r>
+              <a:rPr sz="1500">
+                <a:solidFill>
+                  <a:srgbClr val="22282E"/>
+                </a:solidFill>
+              </a:rPr>
+              <a:t>•  Criterio de aceptación: el valor impreso coincide con la dirección de la instrucción siguiente a</a:t>
+            </a:r>
+          </a:p>
+          <a:p>
+            <a:pPr>
+              <a:spcAft>
+                <a:spcPts val="600"/>
+              </a:spcAft>
+            </a:pPr>
+            <a:r>
+              <a:rPr sz="1500">
+                <a:solidFill>
+                  <a:srgbClr val="22282E"/>
+                </a:solidFill>
+              </a:rPr>
+              <a:t>•  call triple en main (verificable con disassemble main).</a:t>
             </a:r>
           </a:p>
         </p:txBody>
@@ -3511,7 +3499,7 @@
                   <a:srgbClr val="0B3D2E"/>
                 </a:solidFill>
               </a:rPr>
-              <a:t>🔗 Referencias</a:t>
+              <a:t>⚠️ Errores comunes</a:t>
             </a:r>
           </a:p>
         </p:txBody>
@@ -3549,6 +3537,319 @@
                   <a:srgbClr val="22282E"/>
                 </a:solidFill>
               </a:rPr>
+              <a:t>•  No encuentras saved RBP — Compilaste con optimización u -fomit-frame-pointer; usa -O0</a:t>
+            </a:r>
+          </a:p>
+          <a:p>
+            <a:pPr>
+              <a:spcAft>
+                <a:spcPts val="600"/>
+              </a:spcAft>
+            </a:pPr>
+            <a:r>
+              <a:rPr sz="1500">
+                <a:solidFill>
+                  <a:srgbClr val="22282E"/>
+                </a:solidFill>
+              </a:rPr>
+              <a:t>•  La dirección de retorno "no cuadra" — Confundes crecimiento del stack; recuerda que crece hacia abajo</a:t>
+            </a:r>
+          </a:p>
+          <a:p>
+            <a:pPr>
+              <a:spcAft>
+                <a:spcPts val="600"/>
+              </a:spcAft>
+            </a:pPr>
+            <a:r>
+              <a:rPr sz="1500">
+                <a:solidFill>
+                  <a:srgbClr val="22282E"/>
+                </a:solidFill>
+              </a:rPr>
+              <a:t>•  Segfault por desalineación en x64 — Falta alineación a 16 bytes en RSP antes de call</a:t>
+            </a:r>
+          </a:p>
+          <a:p>
+            <a:pPr>
+              <a:spcAft>
+                <a:spcPts val="600"/>
+              </a:spcAft>
+            </a:pPr>
+            <a:r>
+              <a:rPr sz="1500">
+                <a:solidFill>
+                  <a:srgbClr val="22282E"/>
+                </a:solidFill>
+              </a:rPr>
+              <a:t>•  Argumentos "vacíos" en registros — En x86 van por stack, no por registros</a:t>
+            </a:r>
+          </a:p>
+          <a:p>
+            <a:pPr>
+              <a:spcAft>
+                <a:spcPts val="600"/>
+              </a:spcAft>
+            </a:pPr>
+            <a:r>
+              <a:rPr sz="1500">
+                <a:solidFill>
+                  <a:srgbClr val="22282E"/>
+                </a:solidFill>
+              </a:rPr>
+              <a:t>•  info registers no muestra R8-R15 — Estás en un binario de 32 bits</a:t>
+            </a:r>
+          </a:p>
+        </p:txBody>
+      </p:sp>
+    </p:spTree>
+  </p:cSld>
+  <p:clrMapOvr>
+    <a:masterClrMapping/>
+  </p:clrMapOvr>
+</p:sld>
+</file>
+
+<file path=ppt/slides/slide13.xml><?xml version="1.0" encoding="utf-8"?>
+<p:sld xmlns:a="http://schemas.openxmlformats.org/drawingml/2006/main" xmlns:p="http://schemas.openxmlformats.org/presentationml/2006/main" xmlns:r="http://schemas.openxmlformats.org/officeDocument/2006/relationships">
+  <p:cSld>
+    <p:spTree>
+      <p:nvGrpSpPr>
+        <p:cNvPr id="1" name=""/>
+        <p:cNvGrpSpPr/>
+        <p:nvPr/>
+      </p:nvGrpSpPr>
+      <p:grpSpPr/>
+      <p:sp>
+        <p:nvSpPr>
+          <p:cNvPr id="2" name="TextBox 1"/>
+          <p:cNvSpPr txBox="1"/>
+          <p:nvPr/>
+        </p:nvSpPr>
+        <p:spPr>
+          <a:xfrm>
+            <a:off x="457200" y="320040"/>
+            <a:ext cx="8229600" cy="822960"/>
+          </a:xfrm>
+          <a:prstGeom prst="rect">
+            <a:avLst/>
+          </a:prstGeom>
+          <a:noFill/>
+        </p:spPr>
+        <p:txBody>
+          <a:bodyPr wrap="square">
+            <a:spAutoFit/>
+          </a:bodyPr>
+          <a:lstStyle/>
+          <a:p>
+            <a:r>
+              <a:rPr sz="2600" b="1">
+                <a:solidFill>
+                  <a:srgbClr val="0B3D2E"/>
+                </a:solidFill>
+              </a:rPr>
+              <a:t>❓ Preguntas frecuentes</a:t>
+            </a:r>
+          </a:p>
+        </p:txBody>
+      </p:sp>
+      <p:sp>
+        <p:nvSpPr>
+          <p:cNvPr id="3" name="TextBox 2"/>
+          <p:cNvSpPr txBox="1"/>
+          <p:nvPr/>
+        </p:nvSpPr>
+        <p:spPr>
+          <a:xfrm>
+            <a:off x="457200" y="1280160"/>
+            <a:ext cx="8229600" cy="4937760"/>
+          </a:xfrm>
+          <a:prstGeom prst="rect">
+            <a:avLst/>
+          </a:prstGeom>
+          <a:noFill/>
+        </p:spPr>
+        <p:txBody>
+          <a:bodyPr wrap="square">
+            <a:spAutoFit/>
+          </a:bodyPr>
+          <a:lstStyle/>
+          <a:p>
+            <a:pPr>
+              <a:spcAft>
+                <a:spcPts val="600"/>
+              </a:spcAft>
+            </a:pPr>
+            <a:r>
+              <a:rPr sz="1500">
+                <a:solidFill>
+                  <a:srgbClr val="22282E"/>
+                </a:solidFill>
+              </a:rPr>
+              <a:t>•  ❓ ¿Por qué el stack crece hacia abajo? Es una convención histórica que permite que stack y heap</a:t>
+            </a:r>
+          </a:p>
+          <a:p>
+            <a:pPr>
+              <a:spcAft>
+                <a:spcPts val="600"/>
+              </a:spcAft>
+            </a:pPr>
+            <a:r>
+              <a:rPr sz="1500">
+                <a:solidFill>
+                  <a:srgbClr val="22282E"/>
+                </a:solidFill>
+              </a:rPr>
+              <a:t>•  crezcan uno hacia el otro maximizando el espacio disponible.</a:t>
+            </a:r>
+          </a:p>
+          <a:p>
+            <a:pPr>
+              <a:spcAft>
+                <a:spcPts val="600"/>
+              </a:spcAft>
+            </a:pPr>
+            <a:r>
+              <a:rPr sz="1500">
+                <a:solidFill>
+                  <a:srgbClr val="22282E"/>
+                </a:solidFill>
+              </a:rPr>
+              <a:t>•  ❓ ¿Qué diferencia hay entre cdecl y stdcall? Ambas pasan argumentos por stack en x86; en cdecl</a:t>
+            </a:r>
+          </a:p>
+          <a:p>
+            <a:pPr>
+              <a:spcAft>
+                <a:spcPts val="600"/>
+              </a:spcAft>
+            </a:pPr>
+            <a:r>
+              <a:rPr sz="1500">
+                <a:solidFill>
+                  <a:srgbClr val="22282E"/>
+                </a:solidFill>
+              </a:rPr>
+              <a:t>•  limpia el llamador, en stdcall limpia la función llamada.</a:t>
+            </a:r>
+          </a:p>
+          <a:p>
+            <a:pPr>
+              <a:spcAft>
+                <a:spcPts val="600"/>
+              </a:spcAft>
+            </a:pPr>
+            <a:r>
+              <a:rPr sz="1500">
+                <a:solidFill>
+                  <a:srgbClr val="22282E"/>
+                </a:solidFill>
+              </a:rPr>
+              <a:t>•  ❓ ¿La red zone puede romper mis exploits? Sí: si escribes bajo RSP asumiendo que está libre,</a:t>
+            </a:r>
+          </a:p>
+          <a:p>
+            <a:pPr>
+              <a:spcAft>
+                <a:spcPts val="600"/>
+              </a:spcAft>
+            </a:pPr>
+            <a:r>
+              <a:rPr sz="1500">
+                <a:solidFill>
+                  <a:srgbClr val="22282E"/>
+                </a:solidFill>
+              </a:rPr>
+              <a:t>•  puedes corromper datos que la función hoja usa.</a:t>
+            </a:r>
+          </a:p>
+        </p:txBody>
+      </p:sp>
+    </p:spTree>
+  </p:cSld>
+  <p:clrMapOvr>
+    <a:masterClrMapping/>
+  </p:clrMapOvr>
+</p:sld>
+</file>
+
+<file path=ppt/slides/slide14.xml><?xml version="1.0" encoding="utf-8"?>
+<p:sld xmlns:a="http://schemas.openxmlformats.org/drawingml/2006/main" xmlns:p="http://schemas.openxmlformats.org/presentationml/2006/main" xmlns:r="http://schemas.openxmlformats.org/officeDocument/2006/relationships">
+  <p:cSld>
+    <p:spTree>
+      <p:nvGrpSpPr>
+        <p:cNvPr id="1" name=""/>
+        <p:cNvGrpSpPr/>
+        <p:nvPr/>
+      </p:nvGrpSpPr>
+      <p:grpSpPr/>
+      <p:sp>
+        <p:nvSpPr>
+          <p:cNvPr id="2" name="TextBox 1"/>
+          <p:cNvSpPr txBox="1"/>
+          <p:nvPr/>
+        </p:nvSpPr>
+        <p:spPr>
+          <a:xfrm>
+            <a:off x="457200" y="320040"/>
+            <a:ext cx="8229600" cy="822960"/>
+          </a:xfrm>
+          <a:prstGeom prst="rect">
+            <a:avLst/>
+          </a:prstGeom>
+          <a:noFill/>
+        </p:spPr>
+        <p:txBody>
+          <a:bodyPr wrap="square">
+            <a:spAutoFit/>
+          </a:bodyPr>
+          <a:lstStyle/>
+          <a:p>
+            <a:r>
+              <a:rPr sz="2600" b="1">
+                <a:solidFill>
+                  <a:srgbClr val="0B3D2E"/>
+                </a:solidFill>
+              </a:rPr>
+              <a:t>🔗 Referencias</a:t>
+            </a:r>
+          </a:p>
+        </p:txBody>
+      </p:sp>
+      <p:sp>
+        <p:nvSpPr>
+          <p:cNvPr id="3" name="TextBox 2"/>
+          <p:cNvSpPr txBox="1"/>
+          <p:nvPr/>
+        </p:nvSpPr>
+        <p:spPr>
+          <a:xfrm>
+            <a:off x="457200" y="1280160"/>
+            <a:ext cx="8229600" cy="4937760"/>
+          </a:xfrm>
+          <a:prstGeom prst="rect">
+            <a:avLst/>
+          </a:prstGeom>
+          <a:noFill/>
+        </p:spPr>
+        <p:txBody>
+          <a:bodyPr wrap="square">
+            <a:spAutoFit/>
+          </a:bodyPr>
+          <a:lstStyle/>
+          <a:p>
+            <a:pPr>
+              <a:spcAft>
+                <a:spcPts val="600"/>
+              </a:spcAft>
+            </a:pPr>
+            <a:r>
+              <a:rPr sz="1500">
+                <a:solidFill>
+                  <a:srgbClr val="22282E"/>
+                </a:solidFill>
+              </a:rPr>
               <a:t>•  System V AMD64 ABI — &lt;https://gitlab.com/x86-psABIs/x86-64-ABI&gt;</a:t>
             </a:r>
           </a:p>
@@ -3599,6 +3900,81 @@
           </a:p>
         </p:txBody>
       </p:sp>
+    </p:spTree>
+  </p:cSld>
+  <p:clrMapOvr>
+    <a:masterClrMapping/>
+  </p:clrMapOvr>
+</p:sld>
+</file>
+
+<file path=ppt/slides/slide15.xml><?xml version="1.0" encoding="utf-8"?>
+<p:sld xmlns:a="http://schemas.openxmlformats.org/drawingml/2006/main" xmlns:p="http://schemas.openxmlformats.org/presentationml/2006/main" xmlns:r="http://schemas.openxmlformats.org/officeDocument/2006/relationships">
+  <p:cSld>
+    <p:spTree>
+      <p:nvGrpSpPr>
+        <p:cNvPr id="1" name=""/>
+        <p:cNvGrpSpPr/>
+        <p:nvPr/>
+      </p:nvGrpSpPr>
+      <p:grpSpPr/>
+      <p:sp>
+        <p:nvSpPr>
+          <p:cNvPr id="2" name="TextBox 1"/>
+          <p:cNvSpPr txBox="1"/>
+          <p:nvPr/>
+        </p:nvSpPr>
+        <p:spPr>
+          <a:xfrm>
+            <a:off x="457200" y="274320"/>
+            <a:ext cx="8229600" cy="640080"/>
+          </a:xfrm>
+          <a:prstGeom prst="rect">
+            <a:avLst/>
+          </a:prstGeom>
+          <a:noFill/>
+        </p:spPr>
+        <p:txBody>
+          <a:bodyPr wrap="square">
+            <a:spAutoFit/>
+          </a:bodyPr>
+          <a:lstStyle/>
+          <a:p>
+            <a:r>
+              <a:rPr sz="2200" b="1">
+                <a:solidFill>
+                  <a:srgbClr val="0B3D2E"/>
+                </a:solidFill>
+              </a:rPr>
+              <a:t>Diagrama de la clase</a:t>
+            </a:r>
+          </a:p>
+        </p:txBody>
+      </p:sp>
+      <p:pic>
+        <p:nvPicPr>
+          <p:cNvPr id="3" name="Picture 2" descr="709e0b71e48d5d83.png"/>
+          <p:cNvPicPr>
+            <a:picLocks noChangeAspect="1"/>
+          </p:cNvPicPr>
+          <p:nvPr/>
+        </p:nvPicPr>
+        <p:blipFill>
+          <a:blip r:embed="rId2"/>
+          <a:stretch>
+            <a:fillRect/>
+          </a:stretch>
+        </p:blipFill>
+        <p:spPr>
+          <a:xfrm>
+            <a:off x="3566662" y="1097280"/>
+            <a:ext cx="2010675" cy="5303520"/>
+          </a:xfrm>
+          <a:prstGeom prst="rect">
+            <a:avLst/>
+          </a:prstGeom>
+        </p:spPr>
+      </p:pic>
     </p:spTree>
   </p:cSld>
   <p:clrMapOvr>
@@ -4122,7 +4498,7 @@
                   <a:srgbClr val="0B3D2E"/>
                 </a:solidFill>
               </a:rPr>
-              <a:t>📖 Definiciones y características</a:t>
+              <a:t>🧠 Explicación en profundidad</a:t>
             </a:r>
           </a:p>
         </p:txBody>
@@ -4160,97 +4536,97 @@
                   <a:srgbClr val="22282E"/>
                 </a:solidFill>
               </a:rPr>
-              <a:t>•  Stack: región de memoria LIFO por hilo que crece hacia direcciones menores. Clave: push</a:t>
-            </a:r>
-          </a:p>
-          <a:p>
-            <a:pPr>
-              <a:spcAft>
-                <a:spcPts val="600"/>
-              </a:spcAft>
-            </a:pPr>
-            <a:r>
-              <a:rPr sz="1500">
-                <a:solidFill>
-                  <a:srgbClr val="22282E"/>
-                </a:solidFill>
-              </a:rPr>
-              <a:t>•  resta a RSP, pop suma.</a:t>
-            </a:r>
-          </a:p>
-          <a:p>
-            <a:pPr>
-              <a:spcAft>
-                <a:spcPts val="600"/>
-              </a:spcAft>
-            </a:pPr>
-            <a:r>
-              <a:rPr sz="1500">
-                <a:solidFill>
-                  <a:srgbClr val="22282E"/>
-                </a:solidFill>
-              </a:rPr>
-              <a:t>•  RSP (stack pointer): apunta al tope del stack. Clave: toda instrucción push/call lo modifica.</a:t>
-            </a:r>
-          </a:p>
-          <a:p>
-            <a:pPr>
-              <a:spcAft>
-                <a:spcPts val="600"/>
-              </a:spcAft>
-            </a:pPr>
-            <a:r>
-              <a:rPr sz="1500">
-                <a:solidFill>
-                  <a:srgbClr val="22282E"/>
-                </a:solidFill>
-              </a:rPr>
-              <a:t>•  RBP (base pointer): ancla el frame actual; las locales se referencian como [rbp-X]. Clave:</a:t>
-            </a:r>
-          </a:p>
-          <a:p>
-            <a:pPr>
-              <a:spcAft>
-                <a:spcPts val="600"/>
-              </a:spcAft>
-            </a:pPr>
-            <a:r>
-              <a:rPr sz="1500">
-                <a:solidFill>
-                  <a:srgbClr val="22282E"/>
-                </a:solidFill>
-              </a:rPr>
-              <a:t>•  con -fomit-frame-pointer puede no usarse.</a:t>
-            </a:r>
-          </a:p>
-          <a:p>
-            <a:pPr>
-              <a:spcAft>
-                <a:spcPts val="600"/>
-              </a:spcAft>
-            </a:pPr>
-            <a:r>
-              <a:rPr sz="1500">
-                <a:solidFill>
-                  <a:srgbClr val="22282E"/>
-                </a:solidFill>
-              </a:rPr>
-              <a:t>•  Dirección de retorno: dirección que call guarda en el stack para que ret sepa a dónde volver.</a:t>
-            </a:r>
-          </a:p>
-          <a:p>
-            <a:pPr>
-              <a:spcAft>
-                <a:spcPts val="600"/>
-              </a:spcAft>
-            </a:pPr>
-            <a:r>
-              <a:rPr sz="1500">
-                <a:solidFill>
-                  <a:srgbClr val="22282E"/>
-                </a:solidFill>
-              </a:rPr>
-              <a:t>•  Clave: sobrescribirla es la esencia del stack overflow.</a:t>
+              <a:t>•  La pila (stack) es la región de memoria donde una función guarda sus variables locales, sus</a:t>
+            </a:r>
+          </a:p>
+          <a:p>
+            <a:pPr>
+              <a:spcAft>
+                <a:spcPts val="600"/>
+              </a:spcAft>
+            </a:pPr>
+            <a:r>
+              <a:rPr sz="1500">
+                <a:solidFill>
+                  <a:srgbClr val="22282E"/>
+                </a:solidFill>
+              </a:rPr>
+              <a:t>•  argumentos y —lo decisivo— la dirección de retorno. Es una estructura LIFO (último en</a:t>
+            </a:r>
+          </a:p>
+          <a:p>
+            <a:pPr>
+              <a:spcAft>
+                <a:spcPts val="600"/>
+              </a:spcAft>
+            </a:pPr>
+            <a:r>
+              <a:rPr sz="1500">
+                <a:solidFill>
+                  <a:srgbClr val="22282E"/>
+                </a:solidFill>
+              </a:rPr>
+              <a:t>•  entrar, primero en salir) con dos peculiaridades que hay que tener grabadas. Primera: crece</a:t>
+            </a:r>
+          </a:p>
+          <a:p>
+            <a:pPr>
+              <a:spcAft>
+                <a:spcPts val="600"/>
+              </a:spcAft>
+            </a:pPr>
+            <a:r>
+              <a:rPr sz="1500">
+                <a:solidFill>
+                  <a:srgbClr val="22282E"/>
+                </a:solidFill>
+              </a:rPr>
+              <a:t>•  hacia direcciones más bajas, es decir, apilar (push) resta de RSP y desapilar (pop) le</a:t>
+            </a:r>
+          </a:p>
+          <a:p>
+            <a:pPr>
+              <a:spcAft>
+                <a:spcPts val="600"/>
+              </a:spcAft>
+            </a:pPr>
+            <a:r>
+              <a:rPr sz="1500">
+                <a:solidFill>
+                  <a:srgbClr val="22282E"/>
+                </a:solidFill>
+              </a:rPr>
+              <a:t>•  suma. Segunda: RSP apunta siempre a la cima (el último dato apilado), mientras que RBP</a:t>
+            </a:r>
+          </a:p>
+          <a:p>
+            <a:pPr>
+              <a:spcAft>
+                <a:spcPts val="600"/>
+              </a:spcAft>
+            </a:pPr>
+            <a:r>
+              <a:rPr sz="1500">
+                <a:solidFill>
+                  <a:srgbClr val="22282E"/>
+                </a:solidFill>
+              </a:rPr>
+              <a:t>•  (base pointer) marca la base del marco de la función actual, dando un punto de referencia fijo</a:t>
+            </a:r>
+          </a:p>
+          <a:p>
+            <a:pPr>
+              <a:spcAft>
+                <a:spcPts val="600"/>
+              </a:spcAft>
+            </a:pPr>
+            <a:r>
+              <a:rPr sz="1500">
+                <a:solidFill>
+                  <a:srgbClr val="22282E"/>
+                </a:solidFill>
+              </a:rPr>
+              <a:t>•  para localizar variables y argumentos. Toda la explotación de stack de esta parte consiste en</a:t>
             </a:r>
           </a:p>
         </p:txBody>
@@ -4301,7 +4677,7 @@
                   <a:srgbClr val="0B3D2E"/>
                 </a:solidFill>
               </a:rPr>
-              <a:t>🧰 Herramientas y preparación</a:t>
+              <a:t>📖 Definiciones y características</a:t>
             </a:r>
           </a:p>
         </p:txBody>
@@ -4339,22 +4715,97 @@
                   <a:srgbClr val="22282E"/>
                 </a:solidFill>
               </a:rPr>
-              <a:t>•  sudo apt install -y gdb gcc</a:t>
-            </a:r>
-          </a:p>
-          <a:p>
-            <a:pPr>
-              <a:spcAft>
-                <a:spcPts val="600"/>
-              </a:spcAft>
-            </a:pPr>
-            <a:r>
-              <a:rPr sz="1500">
-                <a:solidFill>
-                  <a:srgbClr val="22282E"/>
-                </a:solidFill>
-              </a:rPr>
-              <a:t>•  Usa la misma VM de la clase 116. Compila siempre con -O0 -g mientras aprendes para no perder el frame.</a:t>
+              <a:t>•  Stack: región de memoria LIFO por hilo que crece hacia direcciones menores. Clave: push</a:t>
+            </a:r>
+          </a:p>
+          <a:p>
+            <a:pPr>
+              <a:spcAft>
+                <a:spcPts val="600"/>
+              </a:spcAft>
+            </a:pPr>
+            <a:r>
+              <a:rPr sz="1500">
+                <a:solidFill>
+                  <a:srgbClr val="22282E"/>
+                </a:solidFill>
+              </a:rPr>
+              <a:t>•  resta a RSP, pop suma.</a:t>
+            </a:r>
+          </a:p>
+          <a:p>
+            <a:pPr>
+              <a:spcAft>
+                <a:spcPts val="600"/>
+              </a:spcAft>
+            </a:pPr>
+            <a:r>
+              <a:rPr sz="1500">
+                <a:solidFill>
+                  <a:srgbClr val="22282E"/>
+                </a:solidFill>
+              </a:rPr>
+              <a:t>•  RSP (stack pointer): apunta al tope del stack. Clave: toda instrucción push/call lo modifica.</a:t>
+            </a:r>
+          </a:p>
+          <a:p>
+            <a:pPr>
+              <a:spcAft>
+                <a:spcPts val="600"/>
+              </a:spcAft>
+            </a:pPr>
+            <a:r>
+              <a:rPr sz="1500">
+                <a:solidFill>
+                  <a:srgbClr val="22282E"/>
+                </a:solidFill>
+              </a:rPr>
+              <a:t>•  RBP (base pointer): ancla el frame actual; las locales se referencian como [rbp-X]. Clave:</a:t>
+            </a:r>
+          </a:p>
+          <a:p>
+            <a:pPr>
+              <a:spcAft>
+                <a:spcPts val="600"/>
+              </a:spcAft>
+            </a:pPr>
+            <a:r>
+              <a:rPr sz="1500">
+                <a:solidFill>
+                  <a:srgbClr val="22282E"/>
+                </a:solidFill>
+              </a:rPr>
+              <a:t>•  con -fomit-frame-pointer puede no usarse.</a:t>
+            </a:r>
+          </a:p>
+          <a:p>
+            <a:pPr>
+              <a:spcAft>
+                <a:spcPts val="600"/>
+              </a:spcAft>
+            </a:pPr>
+            <a:r>
+              <a:rPr sz="1500">
+                <a:solidFill>
+                  <a:srgbClr val="22282E"/>
+                </a:solidFill>
+              </a:rPr>
+              <a:t>•  Dirección de retorno: dirección que call guarda en el stack para que ret sepa a dónde volver.</a:t>
+            </a:r>
+          </a:p>
+          <a:p>
+            <a:pPr>
+              <a:spcAft>
+                <a:spcPts val="600"/>
+              </a:spcAft>
+            </a:pPr>
+            <a:r>
+              <a:rPr sz="1500">
+                <a:solidFill>
+                  <a:srgbClr val="22282E"/>
+                </a:solidFill>
+              </a:rPr>
+              <a:t>•  Clave: sobrescribirla es la esencia del stack overflow.</a:t>
             </a:r>
           </a:p>
         </p:txBody>
@@ -4405,7 +4856,7 @@
                   <a:srgbClr val="0B3D2E"/>
                 </a:solidFill>
               </a:rPr>
-              <a:t>🧪 Laboratorio guiado</a:t>
+              <a:t>📔 Glosario</a:t>
             </a:r>
           </a:p>
         </p:txBody>
@@ -4443,97 +4894,97 @@
                   <a:srgbClr val="22282E"/>
                 </a:solidFill>
               </a:rPr>
-              <a:t>•  Crea frame.c:</a:t>
-            </a:r>
-          </a:p>
-          <a:p>
-            <a:pPr>
-              <a:spcAft>
-                <a:spcPts val="600"/>
-              </a:spcAft>
-            </a:pPr>
-            <a:r>
-              <a:rPr sz="1500">
-                <a:solidFill>
-                  <a:srgbClr val="22282E"/>
-                </a:solidFill>
-              </a:rPr>
-              <a:t>•  long triple(long x) { long r = x  3; return r; }</a:t>
-            </a:r>
-          </a:p>
-          <a:p>
-            <a:pPr>
-              <a:spcAft>
-                <a:spcPts val="600"/>
-              </a:spcAft>
-            </a:pPr>
-            <a:r>
-              <a:rPr sz="1500">
-                <a:solidFill>
-                  <a:srgbClr val="22282E"/>
-                </a:solidFill>
-              </a:rPr>
-              <a:t>•  int main(void) { printf("%ld\n", triple(5)); return 0; }</a:t>
-            </a:r>
-          </a:p>
-          <a:p>
-            <a:pPr>
-              <a:spcAft>
-                <a:spcPts val="600"/>
-              </a:spcAft>
-            </a:pPr>
-            <a:r>
-              <a:rPr sz="1500">
-                <a:solidFill>
-                  <a:srgbClr val="22282E"/>
-                </a:solidFill>
-              </a:rPr>
-              <a:t>•  Compila con símbolos: gcc -O0 -g frame.c -o frame.</a:t>
-            </a:r>
-          </a:p>
-          <a:p>
-            <a:pPr>
-              <a:spcAft>
-                <a:spcPts val="600"/>
-              </a:spcAft>
-            </a:pPr>
-            <a:r>
-              <a:rPr sz="1500">
-                <a:solidFill>
-                  <a:srgbClr val="22282E"/>
-                </a:solidFill>
-              </a:rPr>
-              <a:t>•  Depura y coloca un breakpoint dentro de triple:</a:t>
-            </a:r>
-          </a:p>
-          <a:p>
-            <a:pPr>
-              <a:spcAft>
-                <a:spcPts val="600"/>
-              </a:spcAft>
-            </a:pPr>
-            <a:r>
-              <a:rPr sz="1500">
-                <a:solidFill>
-                  <a:srgbClr val="22282E"/>
-                </a:solidFill>
-              </a:rPr>
-              <a:t>•  gdb -q ./frame</a:t>
-            </a:r>
-          </a:p>
-          <a:p>
-            <a:pPr>
-              <a:spcAft>
-                <a:spcPts val="600"/>
-              </a:spcAft>
-            </a:pPr>
-            <a:r>
-              <a:rPr sz="1500">
-                <a:solidFill>
-                  <a:srgbClr val="22282E"/>
-                </a:solidFill>
-              </a:rPr>
-              <a:t>•  (gdb) break triple</a:t>
+              <a:t>•  Término — Definición concisa</a:t>
+            </a:r>
+          </a:p>
+          <a:p>
+            <a:pPr>
+              <a:spcAft>
+                <a:spcPts val="600"/>
+              </a:spcAft>
+            </a:pPr>
+            <a:r>
+              <a:rPr sz="1500">
+                <a:solidFill>
+                  <a:srgbClr val="22282E"/>
+                </a:solidFill>
+              </a:rPr>
+              <a:t>•  Pila (stack) — Región LIFO con locales, argumentos y dirección de retorno</a:t>
+            </a:r>
+          </a:p>
+          <a:p>
+            <a:pPr>
+              <a:spcAft>
+                <a:spcPts val="600"/>
+              </a:spcAft>
+            </a:pPr>
+            <a:r>
+              <a:rPr sz="1500">
+                <a:solidFill>
+                  <a:srgbClr val="22282E"/>
+                </a:solidFill>
+              </a:rPr>
+              <a:t>•  Crece hacia abajo — Apilar resta de RSP; desapilar le suma</a:t>
+            </a:r>
+          </a:p>
+          <a:p>
+            <a:pPr>
+              <a:spcAft>
+                <a:spcPts val="600"/>
+              </a:spcAft>
+            </a:pPr>
+            <a:r>
+              <a:rPr sz="1500">
+                <a:solidFill>
+                  <a:srgbClr val="22282E"/>
+                </a:solidFill>
+              </a:rPr>
+              <a:t>•  RSP / RBP — Cima de la pila / base del marco actual</a:t>
+            </a:r>
+          </a:p>
+          <a:p>
+            <a:pPr>
+              <a:spcAft>
+                <a:spcPts val="600"/>
+              </a:spcAft>
+            </a:pPr>
+            <a:r>
+              <a:rPr sz="1500">
+                <a:solidFill>
+                  <a:srgbClr val="22282E"/>
+                </a:solidFill>
+              </a:rPr>
+              <a:t>•  push / pop — Apilar y desapilar datos</a:t>
+            </a:r>
+          </a:p>
+          <a:p>
+            <a:pPr>
+              <a:spcAft>
+                <a:spcPts val="600"/>
+              </a:spcAft>
+            </a:pPr>
+            <a:r>
+              <a:rPr sz="1500">
+                <a:solidFill>
+                  <a:srgbClr val="22282E"/>
+                </a:solidFill>
+              </a:rPr>
+              <a:t>•  Stack frame — Marco de pila de una función</a:t>
+            </a:r>
+          </a:p>
+          <a:p>
+            <a:pPr>
+              <a:spcAft>
+                <a:spcPts val="600"/>
+              </a:spcAft>
+            </a:pPr>
+            <a:r>
+              <a:rPr sz="1500">
+                <a:solidFill>
+                  <a:srgbClr val="22282E"/>
+                </a:solidFill>
+              </a:rPr>
+              <a:t>•  Prólogo / epílogo — push rbp; mov rbp,rsp / leave; ret</a:t>
             </a:r>
           </a:p>
         </p:txBody>
@@ -4584,7 +5035,7 @@
                   <a:srgbClr val="0B3D2E"/>
                 </a:solidFill>
               </a:rPr>
-              <a:t>✍️ Ejercicios</a:t>
+              <a:t>🧰 Herramientas y preparación</a:t>
             </a:r>
           </a:p>
         </p:txBody>
@@ -4622,82 +5073,7 @@
                   <a:srgbClr val="22282E"/>
                 </a:solidFill>
               </a:rPr>
-              <a:t>•  Dibuja el stack frame de triple indicando offsets de r, saved RBP y ret address.</a:t>
-            </a:r>
-          </a:p>
-          <a:p>
-            <a:pPr>
-              <a:spcAft>
-                <a:spcPts val="600"/>
-              </a:spcAft>
-            </a:pPr>
-            <a:r>
-              <a:rPr sz="1500">
-                <a:solidFill>
-                  <a:srgbClr val="22282E"/>
-                </a:solidFill>
-              </a:rPr>
-              <a:t>•  Explica con tus palabras qué hacen exactamente call y ret sobre RSP y RIP.</a:t>
-            </a:r>
-          </a:p>
-          <a:p>
-            <a:pPr>
-              <a:spcAft>
-                <a:spcPts val="600"/>
-              </a:spcAft>
-            </a:pPr>
-            <a:r>
-              <a:rPr sz="1500">
-                <a:solidFill>
-                  <a:srgbClr val="22282E"/>
-                </a:solidFill>
-              </a:rPr>
-              <a:t>•  En x64, ¿en qué registros irían los argumentos de f(a,b,c,d)?</a:t>
-            </a:r>
-          </a:p>
-          <a:p>
-            <a:pPr>
-              <a:spcAft>
-                <a:spcPts val="600"/>
-              </a:spcAft>
-            </a:pPr>
-            <a:r>
-              <a:rPr sz="1500">
-                <a:solidFill>
-                  <a:srgbClr val="22282E"/>
-                </a:solidFill>
-              </a:rPr>
-              <a:t>•  Compila con -fomit-frame-pointer y describe cómo cambia el epílogo.</a:t>
-            </a:r>
-          </a:p>
-          <a:p>
-            <a:pPr>
-              <a:spcAft>
-                <a:spcPts val="600"/>
-              </a:spcAft>
-            </a:pPr>
-            <a:r>
-              <a:rPr sz="1500">
-                <a:solidFill>
-                  <a:srgbClr val="22282E"/>
-                </a:solidFill>
-              </a:rPr>
-              <a:t>•  Usa p $rsp y p $rbp en dos frames anidados y calcula el tamaño de cada frame.</a:t>
-            </a:r>
-          </a:p>
-          <a:p>
-            <a:pPr>
-              <a:spcAft>
-                <a:spcPts val="600"/>
-              </a:spcAft>
-            </a:pPr>
-            <a:r>
-              <a:rPr sz="1500">
-                <a:solidFill>
-                  <a:srgbClr val="22282E"/>
-                </a:solidFill>
-              </a:rPr>
-              <a:t>•  Investiga la convención Microsoft x64 y lista sus 4 registros de argumentos.</a:t>
+              <a:t>•  Usa la misma VM de la clase 116. Compila siempre con -O0 -g mientras aprendes para no perder el frame.</a:t>
             </a:r>
           </a:p>
         </p:txBody>
@@ -4748,7 +5124,7 @@
                   <a:srgbClr val="0B3D2E"/>
                 </a:solidFill>
               </a:rPr>
-              <a:t>📝 Reto verificable</a:t>
+              <a:t>🧪 Laboratorio guiado</a:t>
             </a:r>
           </a:p>
         </p:txBody>
@@ -4786,52 +5162,97 @@
                   <a:srgbClr val="22282E"/>
                 </a:solidFill>
               </a:rPr>
-              <a:t>•  Con GDB, encuentra e imprime la dirección de retorno de triple sin usar backtrace, solo con</a:t>
-            </a:r>
-          </a:p>
-          <a:p>
-            <a:pPr>
-              <a:spcAft>
-                <a:spcPts val="600"/>
-              </a:spcAft>
-            </a:pPr>
-            <a:r>
-              <a:rPr sz="1500">
-                <a:solidFill>
-                  <a:srgbClr val="22282E"/>
-                </a:solidFill>
-              </a:rPr>
-              <a:t>•  aritmética sobre $rbp.</a:t>
-            </a:r>
-          </a:p>
-          <a:p>
-            <a:pPr>
-              <a:spcAft>
-                <a:spcPts val="600"/>
-              </a:spcAft>
-            </a:pPr>
-            <a:r>
-              <a:rPr sz="1500">
-                <a:solidFill>
-                  <a:srgbClr val="22282E"/>
-                </a:solidFill>
-              </a:rPr>
-              <a:t>•  Criterio de aceptación: el valor impreso coincide con la dirección de la instrucción siguiente a</a:t>
-            </a:r>
-          </a:p>
-          <a:p>
-            <a:pPr>
-              <a:spcAft>
-                <a:spcPts val="600"/>
-              </a:spcAft>
-            </a:pPr>
-            <a:r>
-              <a:rPr sz="1500">
-                <a:solidFill>
-                  <a:srgbClr val="22282E"/>
-                </a:solidFill>
-              </a:rPr>
-              <a:t>•  call triple en main (verificable con disassemble main).</a:t>
+              <a:t>•  Crea frame.c:</a:t>
+            </a:r>
+          </a:p>
+          <a:p>
+            <a:pPr>
+              <a:spcAft>
+                <a:spcPts val="600"/>
+              </a:spcAft>
+            </a:pPr>
+            <a:r>
+              <a:rPr sz="1500">
+                <a:solidFill>
+                  <a:srgbClr val="22282E"/>
+                </a:solidFill>
+              </a:rPr>
+              <a:t>•  Compila con símbolos: gcc -O0 -g frame.c -o frame.</a:t>
+            </a:r>
+          </a:p>
+          <a:p>
+            <a:pPr>
+              <a:spcAft>
+                <a:spcPts val="600"/>
+              </a:spcAft>
+            </a:pPr>
+            <a:r>
+              <a:rPr sz="1500">
+                <a:solidFill>
+                  <a:srgbClr val="22282E"/>
+                </a:solidFill>
+              </a:rPr>
+              <a:t>•  Depura y coloca un breakpoint dentro de triple:</a:t>
+            </a:r>
+          </a:p>
+          <a:p>
+            <a:pPr>
+              <a:spcAft>
+                <a:spcPts val="600"/>
+              </a:spcAft>
+            </a:pPr>
+            <a:r>
+              <a:rPr sz="1500">
+                <a:solidFill>
+                  <a:srgbClr val="22282E"/>
+                </a:solidFill>
+              </a:rPr>
+              <a:t>•  Examina la parte alta del frame para ver la dirección de retorno guardada por call:</a:t>
+            </a:r>
+          </a:p>
+          <a:p>
+            <a:pPr>
+              <a:spcAft>
+                <a:spcPts val="600"/>
+              </a:spcAft>
+            </a:pPr>
+            <a:r>
+              <a:rPr sz="1500">
+                <a:solidFill>
+                  <a:srgbClr val="22282E"/>
+                </a:solidFill>
+              </a:rPr>
+              <a:t>•  Confirma que la palabra en $rbp+8 apunta de vuelta a main.</a:t>
+            </a:r>
+          </a:p>
+          <a:p>
+            <a:pPr>
+              <a:spcAft>
+                <a:spcPts val="600"/>
+              </a:spcAft>
+            </a:pPr>
+            <a:r>
+              <a:rPr sz="1500">
+                <a:solidFill>
+                  <a:srgbClr val="22282E"/>
+                </a:solidFill>
+              </a:rPr>
+              <a:t>•  Verifica el paso de argumentos: info registers rdi justo al entrar en triple debe valer 5.</a:t>
+            </a:r>
+          </a:p>
+          <a:p>
+            <a:pPr>
+              <a:spcAft>
+                <a:spcPts val="600"/>
+              </a:spcAft>
+            </a:pPr>
+            <a:r>
+              <a:rPr sz="1500">
+                <a:solidFill>
+                  <a:srgbClr val="22282E"/>
+                </a:solidFill>
+              </a:rPr>
+              <a:t>•  Avanza con finish y observa el valor de retorno en RAX (debe ser 15).</a:t>
             </a:r>
           </a:p>
         </p:txBody>
